--- a/Amator_Telsizcilik_C_Isletme_Sinav_Hazirlik_v1.0.pptx
+++ b/Amator_Telsizcilik_C_Isletme_Sinav_Hazirlik_v1.0.pptx
@@ -3340,7 +3340,7 @@
                   <a:srgbClr val="D6E4F0"/>
                 </a:solidFill>
               </a:rPr>
-              <a:t>Yazar: Claude Opus 5 (Anthropic)  —  Editör / Hata kontrolü: H. Erhan Özkan, TA3HRJ</a:t>
+              <a:t>Yazar: Claude Sonnet 5 ve Claude Opus 5 (Anthropic)  —  Editör / Hata kontrolü: H. Erhan Özkan, TA3HX</a:t>
             </a:r>
           </a:p>
         </p:txBody>
